--- a/Documentation/Requirements/Finora_Requirements.pptx
+++ b/Documentation/Requirements/Finora_Requirements.pptx
@@ -600,6 +600,86 @@
         </p:txBody>
       </p:sp>
     </p:spTree>
+  </p:cSld>
+  <p:clrMapOvr>
+    <a:masterClrMapping/>
+  </p:clrMapOvr>
+</p:notes>
+</file>
+
+<file path=ppt/notesSlides/notesSlide12.xml><?xml version="1.0" encoding="utf-8"?>
+<p:notes xmlns:a="http://schemas.openxmlformats.org/drawingml/2006/main" xmlns:r="http://schemas.openxmlformats.org/officeDocument/2006/relationships" xmlns:p="http://schemas.openxmlformats.org/presentationml/2006/main">
+  <p:cSld>
+    <p:spTree>
+      <p:nvGrpSpPr>
+        <p:cNvPr id="1" name=""/>
+        <p:cNvGrpSpPr/>
+        <p:nvPr/>
+      </p:nvGrpSpPr>
+      <p:grpSpPr>
+        <a:xfrm>
+          <a:off x="0" y="0"/>
+          <a:ext cx="0" cy="0"/>
+          <a:chOff x="0" y="0"/>
+          <a:chExt cx="0" cy="0"/>
+        </a:xfrm>
+      </p:grpSpPr>
+      <p:sp>
+        <p:nvSpPr>
+          <p:cNvPr id="2" name="Slide Image Placeholder 1"/>
+          <p:cNvSpPr>
+            <a:spLocks noGrp="1" noRot="1" noChangeAspect="1"/>
+          </p:cNvSpPr>
+          <p:nvPr>
+            <p:ph type="sldImg"/>
+          </p:nvPr>
+        </p:nvSpPr>
+        <p:spPr/>
+      </p:sp>
+      <p:sp>
+        <p:nvSpPr>
+          <p:cNvPr id="3" name="Notes Placeholder 2"/>
+          <p:cNvSpPr>
+            <a:spLocks noGrp="1"/>
+          </p:cNvSpPr>
+          <p:nvPr>
+            <p:ph type="body" idx="1"/>
+          </p:nvPr>
+        </p:nvSpPr>
+        <p:spPr/>
+        <p:txBody>
+          <a:bodyPr/>
+          <a:lstStyle/>
+          <a:p>
+            <a:endParaRPr lang="en-US"/>
+          </a:p>
+        </p:txBody>
+      </p:sp>
+      <p:sp>
+        <p:nvSpPr>
+          <p:cNvPr id="4" name="Slide Number Placeholder 3"/>
+          <p:cNvSpPr>
+            <a:spLocks noGrp="1"/>
+          </p:cNvSpPr>
+          <p:nvPr>
+            <p:ph type="sldNum" sz="quarter" idx="5"/>
+          </p:nvPr>
+        </p:nvSpPr>
+        <p:spPr/>
+        <p:txBody>
+          <a:bodyPr/>
+          <a:lstStyle/>
+          <a:p>
+            <a:endParaRPr lang="en-US"/>
+          </a:p>
+        </p:txBody>
+      </p:sp>
+    </p:spTree>
+    <p:extLst>
+      <p:ext uri="{BB962C8B-B14F-4D97-AF65-F5344CB8AC3E}">
+        <p14:creationId xmlns:p14="http://schemas.microsoft.com/office/powerpoint/2010/main" val="558004776"/>
+      </p:ext>
+    </p:extLst>
   </p:cSld>
   <p:clrMapOvr>
     <a:masterClrMapping/>
@@ -11442,6 +11522,17 @@
               <a:t>$ </a:t>
             </a:r>
             <a:r>
+              <a:rPr lang="en-US" sz="1350" dirty="0">
+                <a:solidFill>
+                  <a:srgbClr val="132238"/>
+                </a:solidFill>
+                <a:latin typeface="Nimbus Sans"/>
+                <a:ea typeface="Nimbus Sans"/>
+                <a:cs typeface="Nimbus Sans"/>
+              </a:rPr>
+              <a:t>4</a:t>
+            </a:r>
+            <a:r>
               <a:rPr kumimoji="0" lang="en-US" sz="1350" b="0" i="0" u="none" strike="noStrike" kern="1200" cap="none" spc="0" normalizeH="0" baseline="0" noProof="0" dirty="0">
                 <a:ln>
                   <a:noFill/>
@@ -11456,7 +11547,7 @@
                 <a:ea typeface="Nimbus Sans"/>
                 <a:cs typeface="Nimbus Sans"/>
               </a:rPr>
-              <a:t>4,00.00</a:t>
+              <a:t>00.00</a:t>
             </a:r>
             <a:endParaRPr kumimoji="0" sz="1350" b="0" i="0" u="none" strike="noStrike" kern="1200" cap="none" spc="0" normalizeH="0" baseline="0" noProof="0" dirty="0">
               <a:ln>
@@ -12770,7 +12861,7 @@
           <p:nvPr/>
         </p:nvPicPr>
         <p:blipFill>
-          <a:blip r:embed="rId2"/>
+          <a:blip r:embed="rId3"/>
           <a:stretch>
             <a:fillRect/>
           </a:stretch>

--- a/Documentation/Requirements/Finora_Requirements.pptx
+++ b/Documentation/Requirements/Finora_Requirements.pptx
@@ -12572,8 +12572,197 @@
                 <a:ea typeface="Nimbus Sans"/>
                 <a:cs typeface="Nimbus Sans"/>
               </a:rPr>
-              <a:t>Employment   Financial aid   Scholarships   Allowance   Self employment   Other income</a:t>
-            </a:r>
+              <a:t>E</a:t>
+            </a:r>
+            <a:r>
+              <a:rPr lang="en-US" sz="975" dirty="0" err="1">
+                <a:solidFill>
+                  <a:srgbClr val="5B6B7E"/>
+                </a:solidFill>
+                <a:latin typeface="Nimbus Sans"/>
+                <a:ea typeface="Nimbus Sans"/>
+                <a:cs typeface="Nimbus Sans"/>
+              </a:rPr>
+              <a:t>ntertainment</a:t>
+            </a:r>
+            <a:r>
+              <a:rPr kumimoji="0" sz="975" b="0" i="0" u="none" strike="noStrike" kern="1200" cap="none" spc="0" normalizeH="0" baseline="0" noProof="0" dirty="0">
+                <a:ln>
+                  <a:noFill/>
+                </a:ln>
+                <a:solidFill>
+                  <a:srgbClr val="5B6B7E"/>
+                </a:solidFill>
+                <a:effectLst/>
+                <a:uLnTx/>
+                <a:uFillTx/>
+                <a:latin typeface="Nimbus Sans"/>
+                <a:ea typeface="Nimbus Sans"/>
+                <a:cs typeface="Nimbus Sans"/>
+              </a:rPr>
+              <a:t>   </a:t>
+            </a:r>
+            <a:r>
+              <a:rPr kumimoji="0" lang="en-US" sz="975" b="0" i="0" u="none" strike="noStrike" kern="1200" cap="none" spc="0" normalizeH="0" baseline="0" noProof="0" dirty="0">
+                <a:ln>
+                  <a:noFill/>
+                </a:ln>
+                <a:solidFill>
+                  <a:srgbClr val="5B6B7E"/>
+                </a:solidFill>
+                <a:effectLst/>
+                <a:uLnTx/>
+                <a:uFillTx/>
+                <a:latin typeface="Nimbus Sans"/>
+                <a:ea typeface="Nimbus Sans"/>
+                <a:cs typeface="Nimbus Sans"/>
+              </a:rPr>
+              <a:t>Tuition</a:t>
+            </a:r>
+            <a:r>
+              <a:rPr kumimoji="0" sz="975" b="0" i="0" u="none" strike="noStrike" kern="1200" cap="none" spc="0" normalizeH="0" baseline="0" noProof="0" dirty="0">
+                <a:ln>
+                  <a:noFill/>
+                </a:ln>
+                <a:solidFill>
+                  <a:srgbClr val="5B6B7E"/>
+                </a:solidFill>
+                <a:effectLst/>
+                <a:uLnTx/>
+                <a:uFillTx/>
+                <a:latin typeface="Nimbus Sans"/>
+                <a:ea typeface="Nimbus Sans"/>
+                <a:cs typeface="Nimbus Sans"/>
+              </a:rPr>
+              <a:t>   </a:t>
+            </a:r>
+            <a:r>
+              <a:rPr kumimoji="0" lang="en-US" sz="975" b="0" i="0" u="none" strike="noStrike" kern="1200" cap="none" spc="0" normalizeH="0" baseline="0" noProof="0" dirty="0">
+                <a:ln>
+                  <a:noFill/>
+                </a:ln>
+                <a:solidFill>
+                  <a:srgbClr val="5B6B7E"/>
+                </a:solidFill>
+                <a:effectLst/>
+                <a:uLnTx/>
+                <a:uFillTx/>
+                <a:latin typeface="Nimbus Sans"/>
+                <a:ea typeface="Nimbus Sans"/>
+                <a:cs typeface="Nimbus Sans"/>
+              </a:rPr>
+              <a:t>Food</a:t>
+            </a:r>
+            <a:r>
+              <a:rPr kumimoji="0" sz="975" b="0" i="0" u="none" strike="noStrike" kern="1200" cap="none" spc="0" normalizeH="0" baseline="0" noProof="0" dirty="0">
+                <a:ln>
+                  <a:noFill/>
+                </a:ln>
+                <a:solidFill>
+                  <a:srgbClr val="5B6B7E"/>
+                </a:solidFill>
+                <a:effectLst/>
+                <a:uLnTx/>
+                <a:uFillTx/>
+                <a:latin typeface="Nimbus Sans"/>
+                <a:ea typeface="Nimbus Sans"/>
+                <a:cs typeface="Nimbus Sans"/>
+              </a:rPr>
+              <a:t>   </a:t>
+            </a:r>
+            <a:r>
+              <a:rPr kumimoji="0" lang="en-US" sz="975" b="0" i="0" u="none" strike="noStrike" kern="1200" cap="none" spc="0" normalizeH="0" baseline="0" noProof="0" dirty="0">
+                <a:ln>
+                  <a:noFill/>
+                </a:ln>
+                <a:solidFill>
+                  <a:srgbClr val="5B6B7E"/>
+                </a:solidFill>
+                <a:effectLst/>
+                <a:uLnTx/>
+                <a:uFillTx/>
+                <a:latin typeface="Nimbus Sans"/>
+                <a:ea typeface="Nimbus Sans"/>
+                <a:cs typeface="Nimbus Sans"/>
+              </a:rPr>
+              <a:t>Utilities</a:t>
+            </a:r>
+            <a:r>
+              <a:rPr kumimoji="0" sz="975" b="0" i="0" u="none" strike="noStrike" kern="1200" cap="none" spc="0" normalizeH="0" baseline="0" noProof="0" dirty="0">
+                <a:ln>
+                  <a:noFill/>
+                </a:ln>
+                <a:solidFill>
+                  <a:srgbClr val="5B6B7E"/>
+                </a:solidFill>
+                <a:effectLst/>
+                <a:uLnTx/>
+                <a:uFillTx/>
+                <a:latin typeface="Nimbus Sans"/>
+                <a:ea typeface="Nimbus Sans"/>
+                <a:cs typeface="Nimbus Sans"/>
+              </a:rPr>
+              <a:t>   </a:t>
+            </a:r>
+            <a:r>
+              <a:rPr kumimoji="0" lang="en-US" sz="975" b="0" i="0" u="none" strike="noStrike" kern="1200" cap="none" spc="0" normalizeH="0" baseline="0" noProof="0" dirty="0">
+                <a:ln>
+                  <a:noFill/>
+                </a:ln>
+                <a:solidFill>
+                  <a:srgbClr val="5B6B7E"/>
+                </a:solidFill>
+                <a:effectLst/>
+                <a:uLnTx/>
+                <a:uFillTx/>
+                <a:latin typeface="Nimbus Sans"/>
+                <a:ea typeface="Nimbus Sans"/>
+                <a:cs typeface="Nimbus Sans"/>
+              </a:rPr>
+              <a:t>Housing</a:t>
+            </a:r>
+            <a:r>
+              <a:rPr kumimoji="0" sz="975" b="0" i="0" u="none" strike="noStrike" kern="1200" cap="none" spc="0" normalizeH="0" baseline="0" noProof="0" dirty="0">
+                <a:ln>
+                  <a:noFill/>
+                </a:ln>
+                <a:solidFill>
+                  <a:srgbClr val="5B6B7E"/>
+                </a:solidFill>
+                <a:effectLst/>
+                <a:uLnTx/>
+                <a:uFillTx/>
+                <a:latin typeface="Nimbus Sans"/>
+                <a:ea typeface="Nimbus Sans"/>
+                <a:cs typeface="Nimbus Sans"/>
+              </a:rPr>
+              <a:t>   Other </a:t>
+            </a:r>
+            <a:r>
+              <a:rPr lang="en-US" sz="975" dirty="0">
+                <a:solidFill>
+                  <a:srgbClr val="5B6B7E"/>
+                </a:solidFill>
+                <a:latin typeface="Nimbus Sans"/>
+                <a:ea typeface="Nimbus Sans"/>
+                <a:cs typeface="Nimbus Sans"/>
+              </a:rPr>
+              <a:t>Expenses</a:t>
+            </a:r>
+            <a:endParaRPr kumimoji="0" sz="975" b="0" i="0" u="none" strike="noStrike" kern="1200" cap="none" spc="0" normalizeH="0" baseline="0" noProof="0" dirty="0">
+              <a:ln>
+                <a:noFill/>
+              </a:ln>
+              <a:solidFill>
+                <a:srgbClr val="5B6B7E"/>
+              </a:solidFill>
+              <a:effectLst/>
+              <a:uLnTx/>
+              <a:uFillTx/>
+              <a:latin typeface="Nimbus Sans"/>
+              <a:ea typeface="Nimbus Sans"/>
+              <a:cs typeface="Nimbus Sans"/>
+            </a:endParaRPr>
           </a:p>
         </p:txBody>
       </p:sp>
@@ -15951,7 +16140,7 @@
           </a:bodyPr>
           <a:lstStyle/>
           <a:p>
-            <a:pPr algn="l">
+            <a:pPr lvl="0">
               <a:defRPr sz="975" b="0">
                 <a:solidFill>
                   <a:srgbClr val="5B6B7E"/>
@@ -15962,7 +16151,7 @@
               </a:defRPr>
             </a:pPr>
             <a:r>
-              <a:rPr sz="975" b="0" dirty="0">
+              <a:rPr lang="en-US" sz="975" dirty="0">
                 <a:solidFill>
                   <a:srgbClr val="5B6B7E"/>
                 </a:solidFill>
@@ -15970,29 +16159,7 @@
                 <a:ea typeface="Nimbus Sans"/>
                 <a:cs typeface="Nimbus Sans"/>
               </a:rPr>
-              <a:t>Employment   Financial aid   Scholarships</a:t>
-            </a:r>
-            <a:r>
-              <a:rPr lang="en-US" sz="975" b="0" dirty="0">
-                <a:solidFill>
-                  <a:srgbClr val="5B6B7E"/>
-                </a:solidFill>
-                <a:latin typeface="Nimbus Sans"/>
-                <a:ea typeface="Nimbus Sans"/>
-                <a:cs typeface="Nimbus Sans"/>
-              </a:rPr>
-              <a:t> </a:t>
-            </a:r>
-            <a:r>
-              <a:rPr sz="975" b="0" dirty="0">
-                <a:solidFill>
-                  <a:srgbClr val="5B6B7E"/>
-                </a:solidFill>
-                <a:latin typeface="Nimbus Sans"/>
-                <a:ea typeface="Nimbus Sans"/>
-                <a:cs typeface="Nimbus Sans"/>
-              </a:rPr>
-              <a:t>Allowance   Self employment   Other income</a:t>
+              <a:t>Entertainment   Tuition   Food   Utilities   Housing   Other Expenses</a:t>
             </a:r>
           </a:p>
         </p:txBody>
